--- a/DBTUNING/ch31_SGA튜닝1_버퍼캐시_리두버퍼/ch31_SGA튜닝_버퍼캐시와리두버퍼.pptx
+++ b/DBTUNING/ch31_SGA튜닝1_버퍼캐시_리두버퍼/ch31_SGA튜닝_버퍼캐시와리두버퍼.pptx
@@ -538,7 +538,7 @@
           <a:lstStyle/>
           <a:p>
             <a:r>
-              <a:t>SGA는 인스턴스의 모든 세션이 공유하는 메모리로, 버퍼 캐시·공유 풀·라지 풀·자바 풀·스트림 풀·리두 로그 버퍼로 구성됩니다. 이 가운데 버퍼 캐시와 공유 풀이 대개 가장 큽니다. 자동 공유 메모리 관리가 크기를 조정하더라도 각 구조의 동작 원리를 알아야 왜 그 크기를 골랐는지 판단할 수 있습니다. 이 장은 그중 읽기 쪽의 버퍼 캐시와 쓰기 쪽의 리두 로그 버퍼를 다룹니다. 16장에서 확인한 ASMM 환경 위에서 각 구조를 깊게 봅니다.</a:t>
+              <a:t>SGA는 인스턴스의 모든 세션이 공유하는 메모리로, 버퍼 캐시·공유 풀·라지 풀·자바 풀·스트림 풀·리두 로그 버퍼로 구성됩니다. 이 가운데 버퍼 캐시와 공유 풀이 대개 가장 큽니다. 자동 공유 메모리 관리가 크기를 조정하더라도 각 구조의 동작 원리를 알아야 왜 그 크기를 골랐는지 판단할 수 있습니다. 이 장은 그중 읽기 쪽의 버퍼 캐시와 쓰기 쪽의 리두 로그 버퍼를 다룹니다. ch29에서 확인한 ASMM 환경 위에서 각 구조를 깊게 봅니다.</a:t>
             </a:r>
           </a:p>
         </p:txBody>
@@ -5508,7 +5508,7 @@
                 <a:latin typeface="맑은 고딕"/>
                 <a:ea typeface="맑은 고딕"/>
               </a:rPr>
-              <a:t>제17장</a:t>
+              <a:t>제ch31</a:t>
             </a:r>
           </a:p>
         </p:txBody>

--- a/DBTUNING/ch31_SGA튜닝1_버퍼캐시_리두버퍼/ch31_SGA튜닝_버퍼캐시와리두버퍼.pptx
+++ b/DBTUNING/ch31_SGA튜닝1_버퍼캐시_리두버퍼/ch31_SGA튜닝_버퍼캐시와리두버퍼.pptx
@@ -5508,7 +5508,7 @@
                 <a:latin typeface="맑은 고딕"/>
                 <a:ea typeface="맑은 고딕"/>
               </a:rPr>
-              <a:t>제ch31</a:t>
+              <a:t>ch31</a:t>
             </a:r>
           </a:p>
         </p:txBody>

--- a/DBTUNING/ch31_SGA튜닝1_버퍼캐시_리두버퍼/ch31_SGA튜닝_버퍼캐시와리두버퍼.pptx
+++ b/DBTUNING/ch31_SGA튜닝1_버퍼캐시_리두버퍼/ch31_SGA튜닝_버퍼캐시와리두버퍼.pptx
@@ -5606,7 +5606,7 @@
                 <a:latin typeface="맑은 고딕"/>
                 <a:ea typeface="맑은 고딕"/>
               </a:rPr>
-              <a:t>17.3</a:t>
+              <a:t>31.3</a:t>
             </a:r>
           </a:p>
         </p:txBody>
@@ -7418,7 +7418,7 @@
                 <a:latin typeface="맑은 고딕"/>
                 <a:ea typeface="맑은 고딕"/>
               </a:rPr>
-              <a:t>17.4</a:t>
+              <a:t>31.4</a:t>
             </a:r>
           </a:p>
         </p:txBody>
@@ -8818,7 +8818,7 @@
                 <a:latin typeface="맑은 고딕"/>
                 <a:ea typeface="맑은 고딕"/>
               </a:rPr>
-              <a:t>17.5</a:t>
+              <a:t>31.5</a:t>
             </a:r>
           </a:p>
         </p:txBody>
@@ -10970,7 +10970,7 @@
                 <a:latin typeface="맑은 고딕"/>
                 <a:ea typeface="맑은 고딕"/>
               </a:rPr>
-              <a:t>17.6</a:t>
+              <a:t>31.6</a:t>
             </a:r>
           </a:p>
         </p:txBody>
@@ -11487,7 +11487,7 @@
                 <a:latin typeface="맑은 고딕"/>
                 <a:ea typeface="맑은 고딕"/>
               </a:rPr>
-              <a:t>•  17.2  버퍼 캐시 구조 — 무엇을, 왜 캐싱하는가</a:t>
+              <a:t>•  31.2  버퍼 캐시 구조 — 무엇을, 왜 캐싱하는가</a:t>
             </a:r>
           </a:p>
           <a:p>
@@ -11504,7 +11504,7 @@
                 <a:latin typeface="맑은 고딕"/>
                 <a:ea typeface="맑은 고딕"/>
               </a:rPr>
-              <a:t>•  17.3  히트율의 함정 — 이 장의 핵심</a:t>
+              <a:t>•  31.3  히트율의 함정 — 이 장의 핵심</a:t>
             </a:r>
           </a:p>
           <a:p>
@@ -11521,7 +11521,7 @@
                 <a:latin typeface="맑은 고딕"/>
                 <a:ea typeface="맑은 고딕"/>
               </a:rPr>
-              <a:t>•  17.4  V$DB_CACHE_ADVICE — 크기 변경 효과 예측</a:t>
+              <a:t>•  31.4  V$DB_CACHE_ADVICE — 크기 변경 효과 예측</a:t>
             </a:r>
           </a:p>
           <a:p>
@@ -11538,7 +11538,7 @@
                 <a:latin typeface="맑은 고딕"/>
                 <a:ea typeface="맑은 고딕"/>
               </a:rPr>
-              <a:t>•  17.5  다중 버퍼 풀 — KEEP과 RECYCLE</a:t>
+              <a:t>•  31.5  다중 버퍼 풀 — KEEP과 RECYCLE</a:t>
             </a:r>
           </a:p>
           <a:p>
@@ -11555,7 +11555,7 @@
                 <a:latin typeface="맑은 고딕"/>
                 <a:ea typeface="맑은 고딕"/>
               </a:rPr>
-              <a:t>•  17.6  캐싱 모드와 대량 스캔의 캐시 동작</a:t>
+              <a:t>•  31.6  캐싱 모드와 대량 스캔의 캐시 동작</a:t>
             </a:r>
           </a:p>
           <a:p>
@@ -11572,7 +11572,7 @@
                 <a:latin typeface="맑은 고딕"/>
                 <a:ea typeface="맑은 고딕"/>
               </a:rPr>
-              <a:t>•  17.7  리두 로그 버퍼 — log buffer space 대기</a:t>
+              <a:t>•  31.7  리두 로그 버퍼 — log buffer space 대기</a:t>
             </a:r>
           </a:p>
         </p:txBody>
@@ -11670,7 +11670,7 @@
                 <a:latin typeface="맑은 고딕"/>
                 <a:ea typeface="맑은 고딕"/>
               </a:rPr>
-              <a:t>17.7</a:t>
+              <a:t>31.7</a:t>
             </a:r>
           </a:p>
         </p:txBody>
@@ -13741,7 +13741,7 @@
                 <a:latin typeface="맑은 고딕"/>
                 <a:ea typeface="맑은 고딕"/>
               </a:rPr>
-              <a:t>17.2</a:t>
+              <a:t>31.2</a:t>
             </a:r>
           </a:p>
         </p:txBody>
